--- a/docs/ppt/grant_crcys_overdose_thresholds_frailty_cachexia.pptx
+++ b/docs/ppt/grant_crcys_overdose_thresholds_frailty_cachexia.pptx
@@ -11809,8 +11809,8 @@
           </p:nvSpPr>
           <p:spPr>
             <a:xfrm>
-              <a:off x="6804039" y="5528933"/>
-              <a:ext cx="536387" cy="72877"/>
+              <a:off x="6767189" y="5528933"/>
+              <a:ext cx="610087" cy="72877"/>
             </a:xfrm>
             <a:prstGeom prst="rect">
               <a:avLst/>
@@ -11842,7 +11842,7 @@
                   <a:latin typeface="Helvetica"/>
                   <a:cs typeface="Helvetica"/>
                 </a:rPr>
-                <a:t>ASG-PPP 1</a:t>
+                <a:t>Malnourished</a:t>
               </a:r>
             </a:p>
           </p:txBody>
@@ -11901,8 +11901,8 @@
           </p:nvSpPr>
           <p:spPr>
             <a:xfrm>
-              <a:off x="7643076" y="5528933"/>
-              <a:ext cx="536387" cy="72877"/>
+              <a:off x="7572393" y="5528933"/>
+              <a:ext cx="677753" cy="72877"/>
             </a:xfrm>
             <a:prstGeom prst="rect">
               <a:avLst/>
@@ -11934,7 +11934,7 @@
                   <a:latin typeface="Helvetica"/>
                   <a:cs typeface="Helvetica"/>
                 </a:rPr>
-                <a:t>ASG-PPP 2</a:t>
+                <a:t>Well-nourished</a:t>
               </a:r>
             </a:p>
           </p:txBody>
